--- a/presentation/phase1-llm-industry-2026-09-10/output/fund-llm-industry-2026-09-11-final.pptx
+++ b/presentation/phase1-llm-industry-2026-09-10/output/fund-llm-industry-2026-09-11-final.pptx
@@ -2,39 +2,39 @@
 <file path=ppt/presentation.xml><?xml version="1.0" encoding="utf-8"?>
 <p:presentation xmlns:p="http://schemas.openxmlformats.org/presentationml/2006/main">
   <p:sldMasterIdLst>
-    <p:sldMasterId xmlns:r="http://schemas.openxmlformats.org/officeDocument/2006/relationships" id="2147483648" r:id="R84d2b608b9c441f1"/>
+    <p:sldMasterId xmlns:r="http://schemas.openxmlformats.org/officeDocument/2006/relationships" id="2147483648" r:id="R29943c1df4064fb3"/>
   </p:sldMasterIdLst>
   <p:notesMasterIdLst>
-    <p:notesMasterId xmlns:r="http://schemas.openxmlformats.org/officeDocument/2006/relationships" r:id="Rd64f342f377c4973"/>
+    <p:notesMasterId xmlns:r="http://schemas.openxmlformats.org/officeDocument/2006/relationships" r:id="Reb1e424d59f84c9e"/>
   </p:notesMasterIdLst>
   <p:sldIdLst>
-    <p:sldId xmlns:r="http://schemas.openxmlformats.org/officeDocument/2006/relationships" id="256" r:id="Re3cf9f243ec54fd4"/>
-    <p:sldId xmlns:r="http://schemas.openxmlformats.org/officeDocument/2006/relationships" id="257" r:id="R7e8fc19170e94526"/>
-    <p:sldId xmlns:r="http://schemas.openxmlformats.org/officeDocument/2006/relationships" id="258" r:id="R106d3005fec34977"/>
-    <p:sldId xmlns:r="http://schemas.openxmlformats.org/officeDocument/2006/relationships" id="259" r:id="R594eec5ed33644a8"/>
-    <p:sldId xmlns:r="http://schemas.openxmlformats.org/officeDocument/2006/relationships" id="260" r:id="R554640a29bc24920"/>
-    <p:sldId xmlns:r="http://schemas.openxmlformats.org/officeDocument/2006/relationships" id="261" r:id="Rfa305572c8484fef"/>
-    <p:sldId xmlns:r="http://schemas.openxmlformats.org/officeDocument/2006/relationships" id="262" r:id="R4ccae3868bfb4571"/>
-    <p:sldId xmlns:r="http://schemas.openxmlformats.org/officeDocument/2006/relationships" id="263" r:id="R2fa5cb5b95934c6a"/>
-    <p:sldId xmlns:r="http://schemas.openxmlformats.org/officeDocument/2006/relationships" id="264" r:id="R57266921a48d4f22"/>
-    <p:sldId xmlns:r="http://schemas.openxmlformats.org/officeDocument/2006/relationships" id="265" r:id="Re77f8ae0de834561"/>
-    <p:sldId xmlns:r="http://schemas.openxmlformats.org/officeDocument/2006/relationships" id="266" r:id="R158b9c3fd49541b8"/>
-    <p:sldId xmlns:r="http://schemas.openxmlformats.org/officeDocument/2006/relationships" id="267" r:id="Rdbb20b645d47482a"/>
-    <p:sldId xmlns:r="http://schemas.openxmlformats.org/officeDocument/2006/relationships" id="268" r:id="Rb799ebe201244c9b"/>
-    <p:sldId xmlns:r="http://schemas.openxmlformats.org/officeDocument/2006/relationships" id="269" r:id="R6165b795cdcb459f"/>
-    <p:sldId xmlns:r="http://schemas.openxmlformats.org/officeDocument/2006/relationships" id="270" r:id="R60d17e93d38f436c"/>
-    <p:sldId xmlns:r="http://schemas.openxmlformats.org/officeDocument/2006/relationships" id="271" r:id="Rb31ebe88f637428e"/>
-    <p:sldId xmlns:r="http://schemas.openxmlformats.org/officeDocument/2006/relationships" id="272" r:id="Rf993cf6d67d240c0"/>
-    <p:sldId xmlns:r="http://schemas.openxmlformats.org/officeDocument/2006/relationships" id="273" r:id="Ra14980e9228b41bf"/>
-    <p:sldId xmlns:r="http://schemas.openxmlformats.org/officeDocument/2006/relationships" id="274" r:id="Rf84a1a9c74c04cad"/>
-    <p:sldId xmlns:r="http://schemas.openxmlformats.org/officeDocument/2006/relationships" id="275" r:id="Raea6e3624ed741e1"/>
-    <p:sldId xmlns:r="http://schemas.openxmlformats.org/officeDocument/2006/relationships" id="276" r:id="Rce0b6adcf48c43a5"/>
-    <p:sldId xmlns:r="http://schemas.openxmlformats.org/officeDocument/2006/relationships" id="277" r:id="R744cb23841874999"/>
-    <p:sldId xmlns:r="http://schemas.openxmlformats.org/officeDocument/2006/relationships" id="278" r:id="R3fcb62ee037a4a42"/>
-    <p:sldId xmlns:r="http://schemas.openxmlformats.org/officeDocument/2006/relationships" id="279" r:id="Rf352259cc05f46a1"/>
-    <p:sldId xmlns:r="http://schemas.openxmlformats.org/officeDocument/2006/relationships" id="280" r:id="Recea77408e67430c"/>
-    <p:sldId xmlns:r="http://schemas.openxmlformats.org/officeDocument/2006/relationships" id="281" r:id="Rc0f5876ea5b24384"/>
-    <p:sldId xmlns:r="http://schemas.openxmlformats.org/officeDocument/2006/relationships" id="282" r:id="Rb1d573fc95854eb3"/>
+    <p:sldId xmlns:r="http://schemas.openxmlformats.org/officeDocument/2006/relationships" id="256" r:id="R2aae9eaa2aa944bd"/>
+    <p:sldId xmlns:r="http://schemas.openxmlformats.org/officeDocument/2006/relationships" id="257" r:id="R7e0a4c0245454c74"/>
+    <p:sldId xmlns:r="http://schemas.openxmlformats.org/officeDocument/2006/relationships" id="258" r:id="R065de95fe9474a28"/>
+    <p:sldId xmlns:r="http://schemas.openxmlformats.org/officeDocument/2006/relationships" id="259" r:id="R930007f0f22a412c"/>
+    <p:sldId xmlns:r="http://schemas.openxmlformats.org/officeDocument/2006/relationships" id="260" r:id="Rfdf8c5daffa24066"/>
+    <p:sldId xmlns:r="http://schemas.openxmlformats.org/officeDocument/2006/relationships" id="261" r:id="R0f57e9a343d947c1"/>
+    <p:sldId xmlns:r="http://schemas.openxmlformats.org/officeDocument/2006/relationships" id="262" r:id="R752497ff9eec4b1b"/>
+    <p:sldId xmlns:r="http://schemas.openxmlformats.org/officeDocument/2006/relationships" id="263" r:id="Rd557c72c083f4750"/>
+    <p:sldId xmlns:r="http://schemas.openxmlformats.org/officeDocument/2006/relationships" id="264" r:id="Ra8d27e7b3c084284"/>
+    <p:sldId xmlns:r="http://schemas.openxmlformats.org/officeDocument/2006/relationships" id="265" r:id="R507c90296988482e"/>
+    <p:sldId xmlns:r="http://schemas.openxmlformats.org/officeDocument/2006/relationships" id="266" r:id="R87f7d615e50f4657"/>
+    <p:sldId xmlns:r="http://schemas.openxmlformats.org/officeDocument/2006/relationships" id="267" r:id="R9daadde1c7f347eb"/>
+    <p:sldId xmlns:r="http://schemas.openxmlformats.org/officeDocument/2006/relationships" id="268" r:id="Radfc93f4df414831"/>
+    <p:sldId xmlns:r="http://schemas.openxmlformats.org/officeDocument/2006/relationships" id="269" r:id="R40559e717b2b41a8"/>
+    <p:sldId xmlns:r="http://schemas.openxmlformats.org/officeDocument/2006/relationships" id="270" r:id="Rb6b15e6fcc6d47e2"/>
+    <p:sldId xmlns:r="http://schemas.openxmlformats.org/officeDocument/2006/relationships" id="271" r:id="R8fd87d4e1f0d442d"/>
+    <p:sldId xmlns:r="http://schemas.openxmlformats.org/officeDocument/2006/relationships" id="272" r:id="R24c546fc2dad4458"/>
+    <p:sldId xmlns:r="http://schemas.openxmlformats.org/officeDocument/2006/relationships" id="273" r:id="Rbc971f7d50ed4f23"/>
+    <p:sldId xmlns:r="http://schemas.openxmlformats.org/officeDocument/2006/relationships" id="274" r:id="R9ef8dc5799bc4904"/>
+    <p:sldId xmlns:r="http://schemas.openxmlformats.org/officeDocument/2006/relationships" id="275" r:id="R748f565553524eb5"/>
+    <p:sldId xmlns:r="http://schemas.openxmlformats.org/officeDocument/2006/relationships" id="276" r:id="R2aba318acc7c43b7"/>
+    <p:sldId xmlns:r="http://schemas.openxmlformats.org/officeDocument/2006/relationships" id="277" r:id="R7a5fd4dc667641d0"/>
+    <p:sldId xmlns:r="http://schemas.openxmlformats.org/officeDocument/2006/relationships" id="278" r:id="Ra55e7aa2eeb24b39"/>
+    <p:sldId xmlns:r="http://schemas.openxmlformats.org/officeDocument/2006/relationships" id="279" r:id="Rce65bdfd5ba449c1"/>
+    <p:sldId xmlns:r="http://schemas.openxmlformats.org/officeDocument/2006/relationships" id="280" r:id="Rd7a30316e4db4d23"/>
+    <p:sldId xmlns:r="http://schemas.openxmlformats.org/officeDocument/2006/relationships" id="281" r:id="Rd84dcf838fb543ee"/>
+    <p:sldId xmlns:r="http://schemas.openxmlformats.org/officeDocument/2006/relationships" id="282" r:id="Rf24d85b760724a46"/>
   </p:sldIdLst>
   <p:sldSz cx="12192000" cy="6858000"/>
   <p:notesSz cx="6858000" cy="9144000"/>
@@ -5351,7 +5351,7 @@
   </p:cSld>
   <p:clrMap bg1="lt1" tx1="dk1" bg2="lt2" tx2="dk2" accent1="accent1" accent2="accent2" accent3="accent3" accent4="accent4" accent5="accent5" accent6="accent6" hlink="hlink" folHlink="folHlink"/>
   <p:sldLayoutIdLst>
-    <p:sldLayoutId xmlns:r="http://schemas.openxmlformats.org/officeDocument/2006/relationships" id="2147483649" r:id="R594e699d38464086"/>
+    <p:sldLayoutId xmlns:r="http://schemas.openxmlformats.org/officeDocument/2006/relationships" id="2147483649" r:id="R78511ff32efa499c"/>
   </p:sldLayoutIdLst>
   <p:txStyles>
     <p:titleStyle>
@@ -6542,7 +6542,7 @@
       </p:sp>
       <p:sp>
         <p:nvSpPr>
-          <p:cNvPr id="3" name="text-4iuov6-MSIM China 实习项目">
+          <p:cNvPr id="3" name="text-4iuov6-Intern 实习项目">
             <a:extLst xmlns:a="http://schemas.openxmlformats.org/drawingml/2006/main">
               <a:ext uri="{FF2B5EF4-FFF2-40B4-BE49-F238E27FC236}">
                 <a16:creationId xmlns:a16="http://schemas.microsoft.com/office/drawing/2014/main" id="{5BFB0230-67C4-4CE3-ABC7-ED3B36216608}"/>
@@ -6593,7 +6593,18 @@
                 <a:ea typeface="Heiti SC"/>
                 <a:cs typeface="Heiti SC"/>
               </a:rPr>
-              <a:t>MSIM China 实习项目</a:t>
+              <a:t>Intern</a:t>
+            </a:r>
+            <a:r>
+              <a:rPr sz="1875" b="0">
+                <a:solidFill>
+                  <a:srgbClr val="FFFFFF"/>
+                </a:solidFill>
+                <a:latin typeface="Heiti SC"/>
+                <a:ea typeface="Heiti SC"/>
+                <a:cs typeface="Heiti SC"/>
+              </a:rPr>
+              <a:t> 实习项目</a:t>
             </a:r>
           </a:p>
         </p:txBody>
@@ -6835,6 +6846,7 @@
           <a:lstStyle xmlns:a="http://schemas.openxmlformats.org/drawingml/2006/main"/>
           <a:p xmlns:a="http://schemas.openxmlformats.org/drawingml/2006/main">
             <a:pPr algn="l">
+              <a:buNone/>
               <a:defRPr sz="2925" b="1">
                 <a:solidFill>
                   <a:srgbClr val="008C83"/>
@@ -6892,6 +6904,7 @@
           <a:lstStyle xmlns:a="http://schemas.openxmlformats.org/drawingml/2006/main"/>
           <a:p xmlns:a="http://schemas.openxmlformats.org/drawingml/2006/main">
             <a:pPr algn="l">
+              <a:buNone/>
               <a:defRPr sz="2325" b="0">
                 <a:solidFill>
                   <a:srgbClr val="253C4A"/>
@@ -6915,6 +6928,7 @@
           </a:p>
           <a:p xmlns:a="http://schemas.openxmlformats.org/drawingml/2006/main">
             <a:pPr algn="l">
+              <a:buNone/>
               <a:defRPr sz="2325" b="0">
                 <a:solidFill>
                   <a:srgbClr val="253C4A"/>
@@ -6972,6 +6986,7 @@
           <a:lstStyle xmlns:a="http://schemas.openxmlformats.org/drawingml/2006/main"/>
           <a:p xmlns:a="http://schemas.openxmlformats.org/drawingml/2006/main">
             <a:pPr algn="l">
+              <a:buNone/>
               <a:defRPr sz="2925" b="1">
                 <a:solidFill>
                   <a:srgbClr val="008C83"/>
@@ -7029,6 +7044,7 @@
           <a:lstStyle xmlns:a="http://schemas.openxmlformats.org/drawingml/2006/main"/>
           <a:p xmlns:a="http://schemas.openxmlformats.org/drawingml/2006/main">
             <a:pPr algn="l">
+              <a:buNone/>
               <a:defRPr sz="2325" b="0">
                 <a:solidFill>
                   <a:srgbClr val="253C4A"/>
@@ -7052,6 +7068,7 @@
           </a:p>
           <a:p xmlns:a="http://schemas.openxmlformats.org/drawingml/2006/main">
             <a:pPr algn="l">
+              <a:buNone/>
               <a:defRPr sz="2325" b="0">
                 <a:solidFill>
                   <a:srgbClr val="253C4A"/>
@@ -7222,7 +7239,7 @@
       </p:sp>
       <p:graphicFrame>
         <p:nvGraphicFramePr>
-          <p:cNvPr id="12" name=""/>
+          <p:cNvPr id="13" name=""/>
           <p:cNvGraphicFramePr/>
           <p:nvPr/>
         </p:nvGraphicFramePr>
@@ -7526,6 +7543,7 @@
           <a:lstStyle xmlns:a="http://schemas.openxmlformats.org/drawingml/2006/main"/>
           <a:p xmlns:a="http://schemas.openxmlformats.org/drawingml/2006/main">
             <a:pPr algn="l">
+              <a:buNone/>
               <a:defRPr sz="1950" b="0">
                 <a:solidFill>
                   <a:srgbClr val="566975"/>
@@ -7583,6 +7601,7 @@
           <a:lstStyle xmlns:a="http://schemas.openxmlformats.org/drawingml/2006/main"/>
           <a:p xmlns:a="http://schemas.openxmlformats.org/drawingml/2006/main">
             <a:pPr algn="l">
+              <a:buNone/>
               <a:defRPr sz="2325" b="1">
                 <a:solidFill>
                   <a:srgbClr val="008C83"/>
@@ -7753,7 +7772,7 @@
       </p:sp>
       <p:graphicFrame>
         <p:nvGraphicFramePr>
-          <p:cNvPr id="11" name=""/>
+          <p:cNvPr id="12" name=""/>
           <p:cNvGraphicFramePr/>
           <p:nvPr/>
         </p:nvGraphicFramePr>
@@ -8178,6 +8197,7 @@
           <a:lstStyle xmlns:a="http://schemas.openxmlformats.org/drawingml/2006/main"/>
           <a:p xmlns:a="http://schemas.openxmlformats.org/drawingml/2006/main">
             <a:pPr algn="l">
+              <a:buNone/>
               <a:defRPr sz="1950" b="0">
                 <a:solidFill>
                   <a:srgbClr val="566975"/>
@@ -8235,6 +8255,7 @@
           <a:lstStyle xmlns:a="http://schemas.openxmlformats.org/drawingml/2006/main"/>
           <a:p xmlns:a="http://schemas.openxmlformats.org/drawingml/2006/main">
             <a:pPr algn="l">
+              <a:buNone/>
               <a:defRPr sz="2100" b="1">
                 <a:solidFill>
                   <a:srgbClr val="008C83"/>
@@ -8405,7 +8426,7 @@
       </p:sp>
       <p:graphicFrame>
         <p:nvGraphicFramePr>
-          <p:cNvPr id="14" name=""/>
+          <p:cNvPr id="15" name=""/>
           <p:cNvGraphicFramePr/>
           <p:nvPr/>
         </p:nvGraphicFramePr>
@@ -8659,6 +8680,7 @@
           <a:lstStyle xmlns:a="http://schemas.openxmlformats.org/drawingml/2006/main"/>
           <a:p xmlns:a="http://schemas.openxmlformats.org/drawingml/2006/main">
             <a:pPr algn="l">
+              <a:buNone/>
               <a:defRPr sz="1950" b="0">
                 <a:solidFill>
                   <a:srgbClr val="566975"/>
@@ -8716,6 +8738,7 @@
           <a:lstStyle xmlns:a="http://schemas.openxmlformats.org/drawingml/2006/main"/>
           <a:p xmlns:a="http://schemas.openxmlformats.org/drawingml/2006/main">
             <a:pPr algn="l">
+              <a:buNone/>
               <a:defRPr sz="2475" b="1">
                 <a:solidFill>
                   <a:srgbClr val="008C83"/>
@@ -8886,14 +8909,14 @@
       </p:sp>
       <p:pic>
         <p:nvPicPr>
-          <p:cNvPr id="15" name=""/>
+          <p:cNvPr id="16" name=""/>
           <p:cNvPicPr>
             <a:picLocks xmlns:a="http://schemas.openxmlformats.org/drawingml/2006/main" noChangeAspect="1"/>
           </p:cNvPicPr>
           <p:nvPr/>
         </p:nvPicPr>
         <p:blipFill>
-          <a:blip xmlns:r="http://schemas.openxmlformats.org/officeDocument/2006/relationships" xmlns:a="http://schemas.openxmlformats.org/drawingml/2006/main" r:embed="Rdb17200d49eb400d"/>
+          <a:blip xmlns:r="http://schemas.openxmlformats.org/officeDocument/2006/relationships" xmlns:a="http://schemas.openxmlformats.org/drawingml/2006/main" r:embed="R5df90a626e4948c7"/>
           <a:stretch xmlns:a="http://schemas.openxmlformats.org/drawingml/2006/main"/>
         </p:blipFill>
         <p:spPr>
@@ -8940,6 +8963,7 @@
           <a:lstStyle xmlns:a="http://schemas.openxmlformats.org/drawingml/2006/main"/>
           <a:p xmlns:a="http://schemas.openxmlformats.org/drawingml/2006/main">
             <a:pPr algn="l">
+              <a:buNone/>
               <a:defRPr sz="1500" b="0">
                 <a:solidFill>
                   <a:srgbClr val="566975"/>
@@ -8997,6 +9021,7 @@
           <a:lstStyle xmlns:a="http://schemas.openxmlformats.org/drawingml/2006/main"/>
           <a:p xmlns:a="http://schemas.openxmlformats.org/drawingml/2006/main">
             <a:pPr algn="l">
+              <a:buNone/>
               <a:defRPr sz="2325" b="1">
                 <a:solidFill>
                   <a:srgbClr val="008C83"/>
@@ -9054,6 +9079,7 @@
           <a:lstStyle xmlns:a="http://schemas.openxmlformats.org/drawingml/2006/main"/>
           <a:p xmlns:a="http://schemas.openxmlformats.org/drawingml/2006/main">
             <a:pPr algn="l">
+              <a:buNone/>
               <a:defRPr sz="2175" b="0">
                 <a:solidFill>
                   <a:srgbClr val="253C4A"/>
@@ -9077,6 +9103,7 @@
           </a:p>
           <a:p xmlns:a="http://schemas.openxmlformats.org/drawingml/2006/main">
             <a:pPr algn="l">
+              <a:buNone/>
               <a:defRPr sz="2175" b="0">
                 <a:solidFill>
                   <a:srgbClr val="253C4A"/>
@@ -9134,6 +9161,7 @@
           <a:lstStyle xmlns:a="http://schemas.openxmlformats.org/drawingml/2006/main"/>
           <a:p xmlns:a="http://schemas.openxmlformats.org/drawingml/2006/main">
             <a:pPr algn="l">
+              <a:buNone/>
               <a:defRPr sz="2325" b="1">
                 <a:solidFill>
                   <a:srgbClr val="19374D"/>
@@ -9191,6 +9219,7 @@
           <a:lstStyle xmlns:a="http://schemas.openxmlformats.org/drawingml/2006/main"/>
           <a:p xmlns:a="http://schemas.openxmlformats.org/drawingml/2006/main">
             <a:pPr algn="l">
+              <a:buNone/>
               <a:defRPr sz="2325" b="1">
                 <a:solidFill>
                   <a:srgbClr val="008C83"/>
@@ -9248,6 +9277,7 @@
           <a:lstStyle xmlns:a="http://schemas.openxmlformats.org/drawingml/2006/main"/>
           <a:p xmlns:a="http://schemas.openxmlformats.org/drawingml/2006/main">
             <a:pPr algn="l">
+              <a:buNone/>
               <a:defRPr sz="2175" b="0">
                 <a:solidFill>
                   <a:srgbClr val="253C4A"/>
@@ -9271,6 +9301,7 @@
           </a:p>
           <a:p xmlns:a="http://schemas.openxmlformats.org/drawingml/2006/main">
             <a:pPr algn="l">
+              <a:buNone/>
               <a:defRPr sz="2175" b="0">
                 <a:solidFill>
                   <a:srgbClr val="253C4A"/>
@@ -9441,7 +9472,7 @@
       </p:sp>
       <p:graphicFrame>
         <p:nvGraphicFramePr>
-          <p:cNvPr id="11" name=""/>
+          <p:cNvPr id="12" name=""/>
           <p:cNvGraphicFramePr/>
           <p:nvPr/>
         </p:nvGraphicFramePr>
@@ -9866,6 +9897,7 @@
           <a:lstStyle xmlns:a="http://schemas.openxmlformats.org/drawingml/2006/main"/>
           <a:p xmlns:a="http://schemas.openxmlformats.org/drawingml/2006/main">
             <a:pPr algn="l">
+              <a:buNone/>
               <a:defRPr sz="2250" b="1">
                 <a:solidFill>
                   <a:srgbClr val="008C83"/>
@@ -10036,7 +10068,7 @@
       </p:sp>
       <p:graphicFrame>
         <p:nvGraphicFramePr>
-          <p:cNvPr id="10" name=""/>
+          <p:cNvPr id="11" name=""/>
           <p:cNvGraphicFramePr/>
           <p:nvPr/>
         </p:nvGraphicFramePr>
@@ -10387,6 +10419,7 @@
           <a:lstStyle xmlns:a="http://schemas.openxmlformats.org/drawingml/2006/main"/>
           <a:p xmlns:a="http://schemas.openxmlformats.org/drawingml/2006/main">
             <a:pPr algn="l">
+              <a:buNone/>
               <a:defRPr sz="2475" b="1">
                 <a:solidFill>
                   <a:srgbClr val="008C83"/>
@@ -10557,7 +10590,7 @@
       </p:sp>
       <p:graphicFrame>
         <p:nvGraphicFramePr>
-          <p:cNvPr id="11" name=""/>
+          <p:cNvPr id="12" name=""/>
           <p:cNvGraphicFramePr/>
           <p:nvPr/>
         </p:nvGraphicFramePr>
@@ -10982,6 +11015,7 @@
           <a:lstStyle xmlns:a="http://schemas.openxmlformats.org/drawingml/2006/main"/>
           <a:p xmlns:a="http://schemas.openxmlformats.org/drawingml/2006/main">
             <a:pPr algn="l">
+              <a:buNone/>
               <a:defRPr sz="1950" b="0">
                 <a:solidFill>
                   <a:srgbClr val="566975"/>
@@ -11039,6 +11073,7 @@
           <a:lstStyle xmlns:a="http://schemas.openxmlformats.org/drawingml/2006/main"/>
           <a:p xmlns:a="http://schemas.openxmlformats.org/drawingml/2006/main">
             <a:pPr algn="l">
+              <a:buNone/>
               <a:defRPr sz="2175" b="1">
                 <a:solidFill>
                   <a:srgbClr val="008C83"/>
@@ -11209,7 +11244,7 @@
       </p:sp>
       <p:graphicFrame>
         <p:nvGraphicFramePr>
-          <p:cNvPr id="10" name=""/>
+          <p:cNvPr id="11" name=""/>
           <p:cNvGraphicFramePr/>
           <p:nvPr/>
         </p:nvGraphicFramePr>
@@ -11513,6 +11548,7 @@
           <a:lstStyle xmlns:a="http://schemas.openxmlformats.org/drawingml/2006/main"/>
           <a:p xmlns:a="http://schemas.openxmlformats.org/drawingml/2006/main">
             <a:pPr algn="l">
+              <a:buNone/>
               <a:defRPr sz="1950" b="0">
                 <a:solidFill>
                   <a:srgbClr val="566975"/>
@@ -11570,6 +11606,7 @@
           <a:lstStyle xmlns:a="http://schemas.openxmlformats.org/drawingml/2006/main"/>
           <a:p xmlns:a="http://schemas.openxmlformats.org/drawingml/2006/main">
             <a:pPr algn="l">
+              <a:buNone/>
               <a:defRPr sz="2175" b="1">
                 <a:solidFill>
                   <a:srgbClr val="008C83"/>
@@ -11772,6 +11809,7 @@
           <a:lstStyle xmlns:a="http://schemas.openxmlformats.org/drawingml/2006/main"/>
           <a:p xmlns:a="http://schemas.openxmlformats.org/drawingml/2006/main">
             <a:pPr algn="l">
+              <a:buNone/>
               <a:defRPr sz="3600" b="1">
                 <a:solidFill>
                   <a:srgbClr val="008C83"/>
@@ -11829,6 +11867,7 @@
           <a:lstStyle xmlns:a="http://schemas.openxmlformats.org/drawingml/2006/main"/>
           <a:p xmlns:a="http://schemas.openxmlformats.org/drawingml/2006/main">
             <a:pPr algn="l">
+              <a:buNone/>
               <a:defRPr sz="2475" b="0">
                 <a:solidFill>
                   <a:srgbClr val="253C4A"/>
@@ -11852,6 +11891,7 @@
           </a:p>
           <a:p xmlns:a="http://schemas.openxmlformats.org/drawingml/2006/main">
             <a:pPr algn="l">
+              <a:buNone/>
               <a:defRPr sz="2475" b="0">
                 <a:solidFill>
                   <a:srgbClr val="253C4A"/>
@@ -11909,6 +11949,7 @@
           <a:lstStyle xmlns:a="http://schemas.openxmlformats.org/drawingml/2006/main"/>
           <a:p xmlns:a="http://schemas.openxmlformats.org/drawingml/2006/main">
             <a:pPr algn="l">
+              <a:buNone/>
               <a:defRPr sz="2625" b="1">
                 <a:solidFill>
                   <a:srgbClr val="19374D"/>
@@ -11966,6 +12007,7 @@
           <a:lstStyle xmlns:a="http://schemas.openxmlformats.org/drawingml/2006/main"/>
           <a:p xmlns:a="http://schemas.openxmlformats.org/drawingml/2006/main">
             <a:pPr algn="l">
+              <a:buNone/>
               <a:defRPr sz="2325" b="0">
                 <a:solidFill>
                   <a:srgbClr val="253C4A"/>
@@ -12136,7 +12178,7 @@
       </p:sp>
       <p:graphicFrame>
         <p:nvGraphicFramePr>
-          <p:cNvPr id="11" name=""/>
+          <p:cNvPr id="12" name=""/>
           <p:cNvGraphicFramePr/>
           <p:nvPr/>
         </p:nvGraphicFramePr>
@@ -12574,6 +12616,7 @@
           <a:lstStyle xmlns:a="http://schemas.openxmlformats.org/drawingml/2006/main"/>
           <a:p xmlns:a="http://schemas.openxmlformats.org/drawingml/2006/main">
             <a:pPr algn="l">
+              <a:buNone/>
               <a:defRPr sz="1950" b="0">
                 <a:solidFill>
                   <a:srgbClr val="566975"/>
@@ -12631,6 +12674,7 @@
           <a:lstStyle xmlns:a="http://schemas.openxmlformats.org/drawingml/2006/main"/>
           <a:p xmlns:a="http://schemas.openxmlformats.org/drawingml/2006/main">
             <a:pPr algn="l">
+              <a:buNone/>
               <a:defRPr sz="2175" b="1">
                 <a:solidFill>
                   <a:srgbClr val="008C83"/>
@@ -12833,6 +12877,7 @@
           <a:lstStyle xmlns:a="http://schemas.openxmlformats.org/drawingml/2006/main"/>
           <a:p xmlns:a="http://schemas.openxmlformats.org/drawingml/2006/main">
             <a:pPr algn="l">
+              <a:buNone/>
               <a:defRPr sz="4425" b="1">
                 <a:solidFill>
                   <a:srgbClr val="008C83"/>
@@ -12890,6 +12935,7 @@
           <a:lstStyle xmlns:a="http://schemas.openxmlformats.org/drawingml/2006/main"/>
           <a:p xmlns:a="http://schemas.openxmlformats.org/drawingml/2006/main">
             <a:pPr algn="l">
+              <a:buNone/>
               <a:defRPr sz="2325" b="0">
                 <a:solidFill>
                   <a:srgbClr val="253C4A"/>
@@ -12947,6 +12993,7 @@
           <a:lstStyle xmlns:a="http://schemas.openxmlformats.org/drawingml/2006/main"/>
           <a:p xmlns:a="http://schemas.openxmlformats.org/drawingml/2006/main">
             <a:pPr algn="l">
+              <a:buNone/>
               <a:defRPr sz="4425" b="1">
                 <a:solidFill>
                   <a:srgbClr val="008C83"/>
@@ -13004,6 +13051,7 @@
           <a:lstStyle xmlns:a="http://schemas.openxmlformats.org/drawingml/2006/main"/>
           <a:p xmlns:a="http://schemas.openxmlformats.org/drawingml/2006/main">
             <a:pPr algn="l">
+              <a:buNone/>
               <a:defRPr sz="2325" b="0">
                 <a:solidFill>
                   <a:srgbClr val="253C4A"/>
@@ -13061,6 +13109,7 @@
           <a:lstStyle xmlns:a="http://schemas.openxmlformats.org/drawingml/2006/main"/>
           <a:p xmlns:a="http://schemas.openxmlformats.org/drawingml/2006/main">
             <a:pPr algn="l">
+              <a:buNone/>
               <a:defRPr sz="2400" b="1">
                 <a:solidFill>
                   <a:srgbClr val="19374D"/>
@@ -13118,6 +13167,7 @@
           <a:lstStyle xmlns:a="http://schemas.openxmlformats.org/drawingml/2006/main"/>
           <a:p xmlns:a="http://schemas.openxmlformats.org/drawingml/2006/main">
             <a:pPr algn="l">
+              <a:buNone/>
               <a:defRPr sz="2325" b="0">
                 <a:solidFill>
                   <a:srgbClr val="253C4A"/>
@@ -13288,7 +13338,7 @@
       </p:sp>
       <p:graphicFrame>
         <p:nvGraphicFramePr>
-          <p:cNvPr id="10" name=""/>
+          <p:cNvPr id="11" name=""/>
           <p:cNvGraphicFramePr/>
           <p:nvPr/>
         </p:nvGraphicFramePr>
@@ -14464,6 +14514,7 @@
           <a:lstStyle xmlns:a="http://schemas.openxmlformats.org/drawingml/2006/main"/>
           <a:p xmlns:a="http://schemas.openxmlformats.org/drawingml/2006/main">
             <a:pPr algn="l">
+              <a:buNone/>
               <a:defRPr sz="1500" b="0">
                 <a:solidFill>
                   <a:srgbClr val="566975"/>
@@ -14634,7 +14685,7 @@
       </p:sp>
       <p:graphicFrame>
         <p:nvGraphicFramePr>
-          <p:cNvPr id="10" name=""/>
+          <p:cNvPr id="11" name=""/>
           <p:cNvGraphicFramePr/>
           <p:nvPr/>
         </p:nvGraphicFramePr>
@@ -15771,6 +15822,7 @@
           <a:lstStyle xmlns:a="http://schemas.openxmlformats.org/drawingml/2006/main"/>
           <a:p xmlns:a="http://schemas.openxmlformats.org/drawingml/2006/main">
             <a:pPr algn="l">
+              <a:buNone/>
               <a:defRPr sz="1500" b="0">
                 <a:solidFill>
                   <a:srgbClr val="566975"/>
@@ -15941,7 +15993,7 @@
       </p:sp>
       <p:graphicFrame>
         <p:nvGraphicFramePr>
-          <p:cNvPr id="10" name=""/>
+          <p:cNvPr id="11" name=""/>
           <p:cNvGraphicFramePr/>
           <p:nvPr/>
         </p:nvGraphicFramePr>
@@ -17052,6 +17104,7 @@
           <a:lstStyle xmlns:a="http://schemas.openxmlformats.org/drawingml/2006/main"/>
           <a:p xmlns:a="http://schemas.openxmlformats.org/drawingml/2006/main">
             <a:pPr algn="l">
+              <a:buNone/>
               <a:defRPr sz="1500" b="0">
                 <a:solidFill>
                   <a:srgbClr val="566975"/>
@@ -17222,7 +17275,7 @@
       </p:sp>
       <p:graphicFrame>
         <p:nvGraphicFramePr>
-          <p:cNvPr id="14" name=""/>
+          <p:cNvPr id="15" name=""/>
           <p:cNvGraphicFramePr/>
           <p:nvPr/>
         </p:nvGraphicFramePr>
@@ -17807,6 +17860,7 @@
           <a:lstStyle xmlns:a="http://schemas.openxmlformats.org/drawingml/2006/main"/>
           <a:p xmlns:a="http://schemas.openxmlformats.org/drawingml/2006/main">
             <a:pPr algn="l">
+              <a:buNone/>
               <a:defRPr sz="1950" b="0">
                 <a:solidFill>
                   <a:srgbClr val="566975"/>
@@ -17864,6 +17918,7 @@
           <a:lstStyle xmlns:a="http://schemas.openxmlformats.org/drawingml/2006/main"/>
           <a:p xmlns:a="http://schemas.openxmlformats.org/drawingml/2006/main">
             <a:pPr algn="l">
+              <a:buNone/>
               <a:defRPr sz="1500" b="0">
                 <a:solidFill>
                   <a:srgbClr val="566975"/>
@@ -17921,6 +17976,7 @@
           <a:lstStyle xmlns:a="http://schemas.openxmlformats.org/drawingml/2006/main"/>
           <a:p xmlns:a="http://schemas.openxmlformats.org/drawingml/2006/main">
             <a:pPr algn="l">
+              <a:buNone/>
               <a:defRPr sz="2175" b="1">
                 <a:solidFill>
                   <a:srgbClr val="008C83"/>
@@ -18091,7 +18147,7 @@
       </p:sp>
       <p:graphicFrame>
         <p:nvGraphicFramePr>
-          <p:cNvPr id="14" name="Chart"/>
+          <p:cNvPr id="16" name="Chart"/>
           <p:cNvGraphicFramePr/>
           <p:nvPr/>
         </p:nvGraphicFramePr>
@@ -18101,13 +18157,13 @@
         </p:xfrm>
         <a:graphic xmlns:a="http://schemas.openxmlformats.org/drawingml/2006/main">
           <a:graphicData uri="http://schemas.openxmlformats.org/drawingml/2006/chart">
-            <c:chart xmlns:r="http://schemas.openxmlformats.org/officeDocument/2006/relationships" xmlns:c="http://schemas.openxmlformats.org/drawingml/2006/chart" r:id="Rd33af024697249e9"/>
+            <c:chart xmlns:r="http://schemas.openxmlformats.org/officeDocument/2006/relationships" xmlns:c="http://schemas.openxmlformats.org/drawingml/2006/chart" r:id="R0d8ce38f4c4d4c4b"/>
           </a:graphicData>
         </a:graphic>
       </p:graphicFrame>
       <p:graphicFrame>
         <p:nvGraphicFramePr>
-          <p:cNvPr id="15" name=""/>
+          <p:cNvPr id="17" name=""/>
           <p:cNvGraphicFramePr/>
           <p:nvPr/>
         </p:nvGraphicFramePr>
@@ -18471,6 +18527,7 @@
           <a:lstStyle xmlns:a="http://schemas.openxmlformats.org/drawingml/2006/main"/>
           <a:p xmlns:a="http://schemas.openxmlformats.org/drawingml/2006/main">
             <a:pPr algn="l">
+              <a:buNone/>
               <a:defRPr sz="1950" b="0">
                 <a:solidFill>
                   <a:srgbClr val="566975"/>
@@ -18528,6 +18585,7 @@
           <a:lstStyle xmlns:a="http://schemas.openxmlformats.org/drawingml/2006/main"/>
           <a:p xmlns:a="http://schemas.openxmlformats.org/drawingml/2006/main">
             <a:pPr algn="l">
+              <a:buNone/>
               <a:defRPr sz="1500" b="0">
                 <a:solidFill>
                   <a:srgbClr val="566975"/>
@@ -18698,7 +18756,7 @@
       </p:sp>
       <p:graphicFrame>
         <p:nvGraphicFramePr>
-          <p:cNvPr id="18" name="Chart"/>
+          <p:cNvPr id="19" name="Chart"/>
           <p:cNvGraphicFramePr/>
           <p:nvPr/>
         </p:nvGraphicFramePr>
@@ -18708,7 +18766,7 @@
         </p:xfrm>
         <a:graphic xmlns:a="http://schemas.openxmlformats.org/drawingml/2006/main">
           <a:graphicData uri="http://schemas.openxmlformats.org/drawingml/2006/chart">
-            <c:chart xmlns:r="http://schemas.openxmlformats.org/officeDocument/2006/relationships" xmlns:c="http://schemas.openxmlformats.org/drawingml/2006/chart" r:id="Rb0eceec540864a16"/>
+            <c:chart xmlns:r="http://schemas.openxmlformats.org/officeDocument/2006/relationships" xmlns:c="http://schemas.openxmlformats.org/drawingml/2006/chart" r:id="R64f316edb59b40c1"/>
           </a:graphicData>
         </a:graphic>
       </p:graphicFrame>
@@ -18746,6 +18804,7 @@
           <a:lstStyle xmlns:a="http://schemas.openxmlformats.org/drawingml/2006/main"/>
           <a:p xmlns:a="http://schemas.openxmlformats.org/drawingml/2006/main">
             <a:pPr algn="l">
+              <a:buNone/>
               <a:defRPr sz="1950" b="0">
                 <a:solidFill>
                   <a:srgbClr val="566975"/>
@@ -18803,6 +18862,7 @@
           <a:lstStyle xmlns:a="http://schemas.openxmlformats.org/drawingml/2006/main"/>
           <a:p xmlns:a="http://schemas.openxmlformats.org/drawingml/2006/main">
             <a:pPr algn="l">
+              <a:buNone/>
               <a:defRPr sz="1500" b="0">
                 <a:solidFill>
                   <a:srgbClr val="566975"/>
@@ -18860,6 +18920,7 @@
           <a:lstStyle xmlns:a="http://schemas.openxmlformats.org/drawingml/2006/main"/>
           <a:p xmlns:a="http://schemas.openxmlformats.org/drawingml/2006/main">
             <a:pPr algn="l">
+              <a:buNone/>
               <a:defRPr sz="2325" b="1">
                 <a:solidFill>
                   <a:srgbClr val="008C83"/>
@@ -18917,6 +18978,7 @@
           <a:lstStyle xmlns:a="http://schemas.openxmlformats.org/drawingml/2006/main"/>
           <a:p xmlns:a="http://schemas.openxmlformats.org/drawingml/2006/main">
             <a:pPr algn="l">
+              <a:buNone/>
               <a:defRPr sz="2100" b="0">
                 <a:solidFill>
                   <a:srgbClr val="253C4A"/>
@@ -18974,6 +19036,7 @@
           <a:lstStyle xmlns:a="http://schemas.openxmlformats.org/drawingml/2006/main"/>
           <a:p xmlns:a="http://schemas.openxmlformats.org/drawingml/2006/main">
             <a:pPr algn="l">
+              <a:buNone/>
               <a:defRPr sz="2325" b="1">
                 <a:solidFill>
                   <a:srgbClr val="008C83"/>
@@ -19031,6 +19094,7 @@
           <a:lstStyle xmlns:a="http://schemas.openxmlformats.org/drawingml/2006/main"/>
           <a:p xmlns:a="http://schemas.openxmlformats.org/drawingml/2006/main">
             <a:pPr algn="l">
+              <a:buNone/>
               <a:defRPr sz="2025" b="0">
                 <a:solidFill>
                   <a:srgbClr val="253C4A"/>
@@ -19054,6 +19118,7 @@
           </a:p>
           <a:p xmlns:a="http://schemas.openxmlformats.org/drawingml/2006/main">
             <a:pPr algn="l">
+              <a:buNone/>
               <a:defRPr sz="2025" b="0">
                 <a:solidFill>
                   <a:srgbClr val="253C4A"/>
@@ -19224,7 +19289,7 @@
       </p:sp>
       <p:graphicFrame>
         <p:nvGraphicFramePr>
-          <p:cNvPr id="13" name=""/>
+          <p:cNvPr id="14" name=""/>
           <p:cNvGraphicFramePr/>
           <p:nvPr/>
         </p:nvGraphicFramePr>
@@ -19528,6 +19593,7 @@
           <a:lstStyle xmlns:a="http://schemas.openxmlformats.org/drawingml/2006/main"/>
           <a:p xmlns:a="http://schemas.openxmlformats.org/drawingml/2006/main">
             <a:pPr algn="l">
+              <a:buNone/>
               <a:defRPr sz="1950" b="0">
                 <a:solidFill>
                   <a:srgbClr val="566975"/>
@@ -19585,6 +19651,7 @@
           <a:lstStyle xmlns:a="http://schemas.openxmlformats.org/drawingml/2006/main"/>
           <a:p xmlns:a="http://schemas.openxmlformats.org/drawingml/2006/main">
             <a:pPr algn="l">
+              <a:buNone/>
               <a:defRPr sz="2025" b="0">
                 <a:solidFill>
                   <a:srgbClr val="566975"/>
@@ -19642,6 +19709,7 @@
           <a:lstStyle xmlns:a="http://schemas.openxmlformats.org/drawingml/2006/main"/>
           <a:p xmlns:a="http://schemas.openxmlformats.org/drawingml/2006/main">
             <a:pPr algn="l">
+              <a:buNone/>
               <a:defRPr sz="2250" b="1">
                 <a:solidFill>
                   <a:srgbClr val="008C83"/>
@@ -19844,6 +19912,7 @@
           <a:lstStyle xmlns:a="http://schemas.openxmlformats.org/drawingml/2006/main"/>
           <a:p xmlns:a="http://schemas.openxmlformats.org/drawingml/2006/main">
             <a:pPr algn="l">
+              <a:buNone/>
               <a:defRPr sz="1500" b="0">
                 <a:solidFill>
                   <a:srgbClr val="566975"/>
@@ -19901,6 +19970,7 @@
           <a:lstStyle xmlns:a="http://schemas.openxmlformats.org/drawingml/2006/main"/>
           <a:p xmlns:a="http://schemas.openxmlformats.org/drawingml/2006/main">
             <a:pPr algn="l">
+              <a:buNone/>
               <a:defRPr sz="2100" b="1">
                 <a:solidFill>
                   <a:srgbClr val="008C83"/>
@@ -19958,6 +20028,7 @@
           <a:lstStyle xmlns:a="http://schemas.openxmlformats.org/drawingml/2006/main"/>
           <a:p xmlns:a="http://schemas.openxmlformats.org/drawingml/2006/main">
             <a:pPr algn="l">
+              <a:buNone/>
               <a:defRPr sz="2250" b="1">
                 <a:solidFill>
                   <a:srgbClr val="19374D"/>
@@ -20015,6 +20086,7 @@
           <a:lstStyle xmlns:a="http://schemas.openxmlformats.org/drawingml/2006/main"/>
           <a:p xmlns:a="http://schemas.openxmlformats.org/drawingml/2006/main">
             <a:pPr algn="l">
+              <a:buNone/>
               <a:defRPr sz="2025" b="0">
                 <a:solidFill>
                   <a:srgbClr val="253C4A"/>
@@ -20072,6 +20144,7 @@
           <a:lstStyle xmlns:a="http://schemas.openxmlformats.org/drawingml/2006/main"/>
           <a:p xmlns:a="http://schemas.openxmlformats.org/drawingml/2006/main">
             <a:pPr algn="l">
+              <a:buNone/>
               <a:defRPr sz="2100" b="1">
                 <a:solidFill>
                   <a:srgbClr val="008C83"/>
@@ -20129,6 +20202,7 @@
           <a:lstStyle xmlns:a="http://schemas.openxmlformats.org/drawingml/2006/main"/>
           <a:p xmlns:a="http://schemas.openxmlformats.org/drawingml/2006/main">
             <a:pPr algn="l">
+              <a:buNone/>
               <a:defRPr sz="2250" b="1">
                 <a:solidFill>
                   <a:srgbClr val="19374D"/>
@@ -20186,6 +20260,7 @@
           <a:lstStyle xmlns:a="http://schemas.openxmlformats.org/drawingml/2006/main"/>
           <a:p xmlns:a="http://schemas.openxmlformats.org/drawingml/2006/main">
             <a:pPr algn="l">
+              <a:buNone/>
               <a:defRPr sz="2025" b="0">
                 <a:solidFill>
                   <a:srgbClr val="253C4A"/>
@@ -20243,6 +20318,7 @@
           <a:lstStyle xmlns:a="http://schemas.openxmlformats.org/drawingml/2006/main"/>
           <a:p xmlns:a="http://schemas.openxmlformats.org/drawingml/2006/main">
             <a:pPr algn="l">
+              <a:buNone/>
               <a:defRPr sz="2100" b="1">
                 <a:solidFill>
                   <a:srgbClr val="008C83"/>
@@ -20300,6 +20376,7 @@
           <a:lstStyle xmlns:a="http://schemas.openxmlformats.org/drawingml/2006/main"/>
           <a:p xmlns:a="http://schemas.openxmlformats.org/drawingml/2006/main">
             <a:pPr algn="l">
+              <a:buNone/>
               <a:defRPr sz="2250" b="1">
                 <a:solidFill>
                   <a:srgbClr val="19374D"/>
@@ -20357,6 +20434,7 @@
           <a:lstStyle xmlns:a="http://schemas.openxmlformats.org/drawingml/2006/main"/>
           <a:p xmlns:a="http://schemas.openxmlformats.org/drawingml/2006/main">
             <a:pPr algn="l">
+              <a:buNone/>
               <a:defRPr sz="2025" b="0">
                 <a:solidFill>
                   <a:srgbClr val="253C4A"/>
@@ -20414,6 +20492,7 @@
           <a:lstStyle xmlns:a="http://schemas.openxmlformats.org/drawingml/2006/main"/>
           <a:p xmlns:a="http://schemas.openxmlformats.org/drawingml/2006/main">
             <a:pPr algn="l">
+              <a:buNone/>
               <a:defRPr sz="3675" b="1">
                 <a:solidFill>
                   <a:srgbClr val="19374D"/>
@@ -20471,6 +20550,7 @@
           <a:lstStyle xmlns:a="http://schemas.openxmlformats.org/drawingml/2006/main"/>
           <a:p xmlns:a="http://schemas.openxmlformats.org/drawingml/2006/main">
             <a:pPr algn="l">
+              <a:buNone/>
               <a:defRPr sz="1875" b="0">
                 <a:solidFill>
                   <a:srgbClr val="566975"/>
@@ -20528,6 +20608,7 @@
           <a:lstStyle xmlns:a="http://schemas.openxmlformats.org/drawingml/2006/main"/>
           <a:p xmlns:a="http://schemas.openxmlformats.org/drawingml/2006/main">
             <a:pPr algn="l">
+              <a:buNone/>
               <a:defRPr sz="3675" b="1">
                 <a:solidFill>
                   <a:srgbClr val="008C83"/>
@@ -20585,6 +20666,7 @@
           <a:lstStyle xmlns:a="http://schemas.openxmlformats.org/drawingml/2006/main"/>
           <a:p xmlns:a="http://schemas.openxmlformats.org/drawingml/2006/main">
             <a:pPr algn="l">
+              <a:buNone/>
               <a:defRPr sz="1875" b="0">
                 <a:solidFill>
                   <a:srgbClr val="566975"/>
@@ -20787,6 +20869,7 @@
           <a:lstStyle xmlns:a="http://schemas.openxmlformats.org/drawingml/2006/main"/>
           <a:p xmlns:a="http://schemas.openxmlformats.org/drawingml/2006/main">
             <a:pPr algn="l">
+              <a:buNone/>
               <a:defRPr sz="1950" b="0">
                 <a:solidFill>
                   <a:srgbClr val="566975"/>
@@ -20812,7 +20895,7 @@
       </p:sp>
       <p:graphicFrame>
         <p:nvGraphicFramePr>
-          <p:cNvPr id="13" name=""/>
+          <p:cNvPr id="14" name=""/>
           <p:cNvGraphicFramePr/>
           <p:nvPr/>
         </p:nvGraphicFramePr>
@@ -21116,6 +21199,7 @@
           <a:lstStyle xmlns:a="http://schemas.openxmlformats.org/drawingml/2006/main"/>
           <a:p xmlns:a="http://schemas.openxmlformats.org/drawingml/2006/main">
             <a:pPr algn="l">
+              <a:buNone/>
               <a:defRPr sz="2775" b="1">
                 <a:solidFill>
                   <a:srgbClr val="008C83"/>
@@ -21318,6 +21402,7 @@
           <a:lstStyle xmlns:a="http://schemas.openxmlformats.org/drawingml/2006/main"/>
           <a:p xmlns:a="http://schemas.openxmlformats.org/drawingml/2006/main">
             <a:pPr algn="l">
+              <a:buNone/>
               <a:defRPr sz="1950" b="0">
                 <a:solidFill>
                   <a:srgbClr val="566975"/>
@@ -21343,7 +21428,7 @@
       </p:sp>
       <p:graphicFrame>
         <p:nvGraphicFramePr>
-          <p:cNvPr id="14" name=""/>
+          <p:cNvPr id="15" name=""/>
           <p:cNvGraphicFramePr/>
           <p:nvPr/>
         </p:nvGraphicFramePr>
@@ -21694,6 +21779,7 @@
           <a:lstStyle xmlns:a="http://schemas.openxmlformats.org/drawingml/2006/main"/>
           <a:p xmlns:a="http://schemas.openxmlformats.org/drawingml/2006/main">
             <a:pPr algn="l">
+              <a:buNone/>
               <a:defRPr sz="2325" b="1">
                 <a:solidFill>
                   <a:srgbClr val="008C83"/>
@@ -21864,7 +21950,7 @@
       </p:sp>
       <p:graphicFrame>
         <p:nvGraphicFramePr>
-          <p:cNvPr id="12" name=""/>
+          <p:cNvPr id="13" name=""/>
           <p:cNvGraphicFramePr/>
           <p:nvPr/>
         </p:nvGraphicFramePr>
@@ -22289,6 +22375,7 @@
           <a:lstStyle xmlns:a="http://schemas.openxmlformats.org/drawingml/2006/main"/>
           <a:p xmlns:a="http://schemas.openxmlformats.org/drawingml/2006/main">
             <a:pPr algn="l">
+              <a:buNone/>
               <a:defRPr sz="1950" b="0">
                 <a:solidFill>
                   <a:srgbClr val="566975"/>
@@ -22346,6 +22433,7 @@
           <a:lstStyle xmlns:a="http://schemas.openxmlformats.org/drawingml/2006/main"/>
           <a:p xmlns:a="http://schemas.openxmlformats.org/drawingml/2006/main">
             <a:pPr algn="l">
+              <a:buNone/>
               <a:defRPr sz="2775" b="1">
                 <a:solidFill>
                   <a:srgbClr val="008C83"/>
@@ -22548,6 +22636,7 @@
           <a:lstStyle xmlns:a="http://schemas.openxmlformats.org/drawingml/2006/main"/>
           <a:p xmlns:a="http://schemas.openxmlformats.org/drawingml/2006/main">
             <a:pPr algn="l">
+              <a:buNone/>
               <a:defRPr sz="1950" b="0">
                 <a:solidFill>
                   <a:srgbClr val="566975"/>
@@ -22605,6 +22694,7 @@
           <a:lstStyle xmlns:a="http://schemas.openxmlformats.org/drawingml/2006/main"/>
           <a:p xmlns:a="http://schemas.openxmlformats.org/drawingml/2006/main">
             <a:pPr algn="l">
+              <a:buNone/>
               <a:defRPr sz="2100" b="1">
                 <a:solidFill>
                   <a:srgbClr val="008C83"/>
@@ -22662,6 +22752,7 @@
           <a:lstStyle xmlns:a="http://schemas.openxmlformats.org/drawingml/2006/main"/>
           <a:p xmlns:a="http://schemas.openxmlformats.org/drawingml/2006/main">
             <a:pPr algn="l">
+              <a:buNone/>
               <a:defRPr sz="2250" b="1">
                 <a:solidFill>
                   <a:srgbClr val="19374D"/>
@@ -22719,6 +22810,7 @@
           <a:lstStyle xmlns:a="http://schemas.openxmlformats.org/drawingml/2006/main"/>
           <a:p xmlns:a="http://schemas.openxmlformats.org/drawingml/2006/main">
             <a:pPr algn="l">
+              <a:buNone/>
               <a:defRPr sz="2025" b="0">
                 <a:solidFill>
                   <a:srgbClr val="253C4A"/>
@@ -22776,6 +22868,7 @@
           <a:lstStyle xmlns:a="http://schemas.openxmlformats.org/drawingml/2006/main"/>
           <a:p xmlns:a="http://schemas.openxmlformats.org/drawingml/2006/main">
             <a:pPr algn="l">
+              <a:buNone/>
               <a:defRPr sz="2100" b="1">
                 <a:solidFill>
                   <a:srgbClr val="008C83"/>
@@ -22833,6 +22926,7 @@
           <a:lstStyle xmlns:a="http://schemas.openxmlformats.org/drawingml/2006/main"/>
           <a:p xmlns:a="http://schemas.openxmlformats.org/drawingml/2006/main">
             <a:pPr algn="l">
+              <a:buNone/>
               <a:defRPr sz="2250" b="1">
                 <a:solidFill>
                   <a:srgbClr val="19374D"/>
@@ -22890,6 +22984,7 @@
           <a:lstStyle xmlns:a="http://schemas.openxmlformats.org/drawingml/2006/main"/>
           <a:p xmlns:a="http://schemas.openxmlformats.org/drawingml/2006/main">
             <a:pPr algn="l">
+              <a:buNone/>
               <a:defRPr sz="2025" b="0">
                 <a:solidFill>
                   <a:srgbClr val="253C4A"/>
@@ -22947,6 +23042,7 @@
           <a:lstStyle xmlns:a="http://schemas.openxmlformats.org/drawingml/2006/main"/>
           <a:p xmlns:a="http://schemas.openxmlformats.org/drawingml/2006/main">
             <a:pPr algn="l">
+              <a:buNone/>
               <a:defRPr sz="2100" b="1">
                 <a:solidFill>
                   <a:srgbClr val="008C83"/>
@@ -23004,6 +23100,7 @@
           <a:lstStyle xmlns:a="http://schemas.openxmlformats.org/drawingml/2006/main"/>
           <a:p xmlns:a="http://schemas.openxmlformats.org/drawingml/2006/main">
             <a:pPr algn="l">
+              <a:buNone/>
               <a:defRPr sz="2250" b="1">
                 <a:solidFill>
                   <a:srgbClr val="19374D"/>
@@ -23061,6 +23158,7 @@
           <a:lstStyle xmlns:a="http://schemas.openxmlformats.org/drawingml/2006/main"/>
           <a:p xmlns:a="http://schemas.openxmlformats.org/drawingml/2006/main">
             <a:pPr algn="l">
+              <a:buNone/>
               <a:defRPr sz="2025" b="0">
                 <a:solidFill>
                   <a:srgbClr val="253C4A"/>
@@ -23118,6 +23216,7 @@
           <a:lstStyle xmlns:a="http://schemas.openxmlformats.org/drawingml/2006/main"/>
           <a:p xmlns:a="http://schemas.openxmlformats.org/drawingml/2006/main">
             <a:pPr algn="l">
+              <a:buNone/>
               <a:defRPr sz="1950" b="0">
                 <a:solidFill>
                   <a:srgbClr val="008C83"/>
@@ -23288,7 +23387,7 @@
       </p:sp>
       <p:graphicFrame>
         <p:nvGraphicFramePr>
-          <p:cNvPr id="11" name=""/>
+          <p:cNvPr id="12" name=""/>
           <p:cNvGraphicFramePr/>
           <p:nvPr/>
         </p:nvGraphicFramePr>
@@ -23639,6 +23738,7 @@
           <a:lstStyle xmlns:a="http://schemas.openxmlformats.org/drawingml/2006/main"/>
           <a:p xmlns:a="http://schemas.openxmlformats.org/drawingml/2006/main">
             <a:pPr algn="l">
+              <a:buNone/>
               <a:defRPr sz="2475" b="1">
                 <a:solidFill>
                   <a:srgbClr val="008C83"/>
@@ -23841,6 +23941,7 @@
           <a:lstStyle xmlns:a="http://schemas.openxmlformats.org/drawingml/2006/main"/>
           <a:p xmlns:a="http://schemas.openxmlformats.org/drawingml/2006/main">
             <a:pPr algn="l">
+              <a:buNone/>
               <a:defRPr sz="1950" b="0">
                 <a:solidFill>
                   <a:srgbClr val="566975"/>
@@ -23866,7 +23967,7 @@
       </p:sp>
       <p:graphicFrame>
         <p:nvGraphicFramePr>
-          <p:cNvPr id="18" name=""/>
+          <p:cNvPr id="19" name=""/>
           <p:cNvGraphicFramePr/>
           <p:nvPr/>
         </p:nvGraphicFramePr>
@@ -24143,6 +24244,7 @@
           <a:lstStyle xmlns:a="http://schemas.openxmlformats.org/drawingml/2006/main"/>
           <a:p xmlns:a="http://schemas.openxmlformats.org/drawingml/2006/main">
             <a:pPr algn="l">
+              <a:buNone/>
               <a:defRPr sz="3675" b="1">
                 <a:solidFill>
                   <a:srgbClr val="008C83"/>
@@ -24200,6 +24302,7 @@
           <a:lstStyle xmlns:a="http://schemas.openxmlformats.org/drawingml/2006/main"/>
           <a:p xmlns:a="http://schemas.openxmlformats.org/drawingml/2006/main">
             <a:pPr algn="l">
+              <a:buNone/>
               <a:defRPr sz="2025" b="0">
                 <a:solidFill>
                   <a:srgbClr val="253C4A"/>
@@ -24257,6 +24360,7 @@
           <a:lstStyle xmlns:a="http://schemas.openxmlformats.org/drawingml/2006/main"/>
           <a:p xmlns:a="http://schemas.openxmlformats.org/drawingml/2006/main">
             <a:pPr algn="l">
+              <a:buNone/>
               <a:defRPr sz="3675" b="1">
                 <a:solidFill>
                   <a:srgbClr val="008C83"/>
@@ -24314,6 +24418,7 @@
           <a:lstStyle xmlns:a="http://schemas.openxmlformats.org/drawingml/2006/main"/>
           <a:p xmlns:a="http://schemas.openxmlformats.org/drawingml/2006/main">
             <a:pPr algn="l">
+              <a:buNone/>
               <a:defRPr sz="2025" b="0">
                 <a:solidFill>
                   <a:srgbClr val="253C4A"/>
@@ -24371,6 +24476,7 @@
           <a:lstStyle xmlns:a="http://schemas.openxmlformats.org/drawingml/2006/main"/>
           <a:p xmlns:a="http://schemas.openxmlformats.org/drawingml/2006/main">
             <a:pPr algn="l">
+              <a:buNone/>
               <a:defRPr sz="1500" b="0">
                 <a:solidFill>
                   <a:srgbClr val="566975"/>
